--- a/Slides_Serverless_UNIFOR_2026.pptx
+++ b/Slides_Serverless_UNIFOR_2026.pptx
@@ -13372,7 +13372,7 @@
                 <a:cs typeface="Calibri"/>
                 <a:sym typeface="Calibri"/>
               </a:rPr>
-              <a:t>▸  Projeta arquitetura serverless multi-cloud</a:t>
+              <a:t>▸  Projeta arquitetura serverless</a:t>
             </a:r>
             <a:endParaRPr b="0" i="0" sz="1000" u="none" cap="none" strike="noStrike">
               <a:solidFill>
@@ -13435,7 +13435,7 @@
                 <a:cs typeface="Calibri"/>
                 <a:sym typeface="Calibri"/>
               </a:rPr>
-              <a:t>▸  Implementa solução funcional e documentada</a:t>
+              <a:t>▸  Implementa solução funcional e documentada PRD</a:t>
             </a:r>
             <a:endParaRPr b="0" i="0" sz="1000" u="none" cap="none" strike="noStrike">
               <a:solidFill>
@@ -13498,7 +13498,19 @@
                 <a:cs typeface="Calibri"/>
                 <a:sym typeface="Calibri"/>
               </a:rPr>
-              <a:t>▸  Análise de custo com estimativa real de TCO</a:t>
+              <a:t>▸  Análise de custo com estimativa real </a:t>
+            </a:r>
+            <a:r>
+              <a:rPr lang="en-US" sz="1000">
+                <a:solidFill>
+                  <a:srgbClr val="E2E8F0"/>
+                </a:solidFill>
+                <a:latin typeface="Calibri"/>
+                <a:ea typeface="Calibri"/>
+                <a:cs typeface="Calibri"/>
+                <a:sym typeface="Calibri"/>
+              </a:rPr>
+              <a:t>de custo total</a:t>
             </a:r>
             <a:endParaRPr b="0" i="0" sz="1000" u="none" cap="none" strike="noStrike">
               <a:solidFill>
@@ -22030,7 +22042,79 @@
                 <a:cs typeface="Calibri"/>
                 <a:sym typeface="Calibri"/>
               </a:rPr>
-              <a:t>🧪  Labs Práticos (30% da NF):  4 labs × 7,5 pts cada  ·  Realizados ao final de cada dia 1 a 4  ·  NF = (Labs × 0,30) + (PF × 0,70)</a:t>
+              <a:t>🧪  Labs Práticos (30% da NF):  </a:t>
+            </a:r>
+            <a:r>
+              <a:rPr lang="en-US" sz="850">
+                <a:solidFill>
+                  <a:srgbClr val="0F2B52"/>
+                </a:solidFill>
+                <a:latin typeface="Calibri"/>
+                <a:ea typeface="Calibri"/>
+                <a:cs typeface="Calibri"/>
+                <a:sym typeface="Calibri"/>
+              </a:rPr>
+              <a:t>2</a:t>
+            </a:r>
+            <a:r>
+              <a:rPr b="0" i="0" lang="en-US" sz="850" u="none" cap="none" strike="noStrike">
+                <a:solidFill>
+                  <a:srgbClr val="0F2B52"/>
+                </a:solidFill>
+                <a:latin typeface="Calibri"/>
+                <a:ea typeface="Calibri"/>
+                <a:cs typeface="Calibri"/>
+                <a:sym typeface="Calibri"/>
+              </a:rPr>
+              <a:t> labs × 7,5 pts cada  ·  Realizados ao final de cada dia </a:t>
+            </a:r>
+            <a:r>
+              <a:rPr lang="en-US" sz="850">
+                <a:solidFill>
+                  <a:srgbClr val="0F2B52"/>
+                </a:solidFill>
+                <a:latin typeface="Calibri"/>
+                <a:ea typeface="Calibri"/>
+                <a:cs typeface="Calibri"/>
+                <a:sym typeface="Calibri"/>
+              </a:rPr>
+              <a:t>2</a:t>
+            </a:r>
+            <a:r>
+              <a:rPr b="0" i="0" lang="en-US" sz="850" u="none" cap="none" strike="noStrike">
+                <a:solidFill>
+                  <a:srgbClr val="0F2B52"/>
+                </a:solidFill>
+                <a:latin typeface="Calibri"/>
+                <a:ea typeface="Calibri"/>
+                <a:cs typeface="Calibri"/>
+                <a:sym typeface="Calibri"/>
+              </a:rPr>
+              <a:t> </a:t>
+            </a:r>
+            <a:r>
+              <a:rPr lang="en-US" sz="850">
+                <a:solidFill>
+                  <a:srgbClr val="0F2B52"/>
+                </a:solidFill>
+                <a:latin typeface="Calibri"/>
+                <a:ea typeface="Calibri"/>
+                <a:cs typeface="Calibri"/>
+                <a:sym typeface="Calibri"/>
+              </a:rPr>
+              <a:t>e 3</a:t>
+            </a:r>
+            <a:r>
+              <a:rPr b="0" i="0" lang="en-US" sz="850" u="none" cap="none" strike="noStrike">
+                <a:solidFill>
+                  <a:srgbClr val="0F2B52"/>
+                </a:solidFill>
+                <a:latin typeface="Calibri"/>
+                <a:ea typeface="Calibri"/>
+                <a:cs typeface="Calibri"/>
+                <a:sym typeface="Calibri"/>
+              </a:rPr>
+              <a:t>  ·  NF = (Labs × 0,30) + (PF × 0,70)</a:t>
             </a:r>
             <a:endParaRPr b="0" i="0" sz="850" u="none" cap="none" strike="noStrike">
               <a:solidFill>
